--- a/01_每週教學簡報_PPT/ERP_第12週_供應鏈管理_(SCM)_與跨企業協同運作.pptx
+++ b/01_每週教學簡報_PPT/ERP_第12週_供應鏈管理_(SCM)_與跨企業協同運作.pptx
@@ -5845,7 +5845,7 @@
                 </a:solidFill>
                 <a:latin typeface="微軟正黑體"/>
               </a:rPr>
-              <a:t>考點 2：長鞭效應四大成因英文名詞與內涵為高頻考題</a:t>
+              <a:t>考點 2：長鞭效應四大成因英文名詞與內涵為核心檢定重點</a:t>
             </a:r>
           </a:p>
           <a:p>
